--- a/assets/brand/decks/fiu-dba-deck.pptx
+++ b/assets/brand/decks/fiu-dba-deck.pptx
@@ -1411,7 +1411,7 @@
       </p:grpSpPr>
       <p:pic>
         <p:nvPicPr>
-          <p:cNvPr id="2" name="Image 0" descr="/tmp/claude-0/-home-user-MalikAI-786-github-io/bd3f9871-f65b-507f-9b3e-375d1ddfe15f/scratchpad/deckassets/mark-fiu-on-dark.png">    </p:cNvPr>
+          <p:cNvPr id="2" name="Image 0" descr="/tmp/deckassets/mark-fiu-on-dark.png">    </p:cNvPr>
           <p:cNvPicPr>
             <a:picLocks noChangeAspect="1"/>
           </p:cNvPicPr>
@@ -4987,7 +4987,7 @@
       </p:grpSpPr>
       <p:pic>
         <p:nvPicPr>
-          <p:cNvPr id="2" name="Image 0" descr="/tmp/claude-0/-home-user-MalikAI-786-github-io/bd3f9871-f65b-507f-9b3e-375d1ddfe15f/scratchpad/deckassets/mark-fiu-on-dark.png">    </p:cNvPr>
+          <p:cNvPr id="2" name="Image 0" descr="/tmp/deckassets/mark-fiu-on-dark.png">    </p:cNvPr>
           <p:cNvPicPr>
             <a:picLocks noChangeAspect="1"/>
           </p:cNvPicPr>
